--- a/documentos/Ficha AVANCES hacia vigilancia tecnologica y anteproyecto completo.pptx
+++ b/documentos/Ficha AVANCES hacia vigilancia tecnologica y anteproyecto completo.pptx
@@ -8457,7 +8457,7 @@
           <a:p>
             <a:fld id="{D744F8A8-A267-B942-B7E8-332CEB7B1ECE}" type="datetimeFigureOut">
               <a:rPr lang="es-CO" smtClean="0"/>
-              <a:t>27/04/26</a:t>
+              <a:t>27/05/26</a:t>
             </a:fld>
             <a:endParaRPr lang="es-CO"/>
           </a:p>
@@ -8657,7 +8657,7 @@
           <a:p>
             <a:fld id="{D744F8A8-A267-B942-B7E8-332CEB7B1ECE}" type="datetimeFigureOut">
               <a:rPr lang="es-CO" smtClean="0"/>
-              <a:t>27/04/26</a:t>
+              <a:t>27/05/26</a:t>
             </a:fld>
             <a:endParaRPr lang="es-CO"/>
           </a:p>
@@ -8867,7 +8867,7 @@
           <a:p>
             <a:fld id="{D744F8A8-A267-B942-B7E8-332CEB7B1ECE}" type="datetimeFigureOut">
               <a:rPr lang="es-CO" smtClean="0"/>
-              <a:t>27/04/26</a:t>
+              <a:t>27/05/26</a:t>
             </a:fld>
             <a:endParaRPr lang="es-CO"/>
           </a:p>
@@ -9067,7 +9067,7 @@
           <a:p>
             <a:fld id="{D744F8A8-A267-B942-B7E8-332CEB7B1ECE}" type="datetimeFigureOut">
               <a:rPr lang="es-CO" smtClean="0"/>
-              <a:t>27/04/26</a:t>
+              <a:t>27/05/26</a:t>
             </a:fld>
             <a:endParaRPr lang="es-CO"/>
           </a:p>
@@ -9343,7 +9343,7 @@
           <a:p>
             <a:fld id="{D744F8A8-A267-B942-B7E8-332CEB7B1ECE}" type="datetimeFigureOut">
               <a:rPr lang="es-CO" smtClean="0"/>
-              <a:t>27/04/26</a:t>
+              <a:t>27/05/26</a:t>
             </a:fld>
             <a:endParaRPr lang="es-CO"/>
           </a:p>
@@ -9611,7 +9611,7 @@
           <a:p>
             <a:fld id="{D744F8A8-A267-B942-B7E8-332CEB7B1ECE}" type="datetimeFigureOut">
               <a:rPr lang="es-CO" smtClean="0"/>
-              <a:t>27/04/26</a:t>
+              <a:t>27/05/26</a:t>
             </a:fld>
             <a:endParaRPr lang="es-CO"/>
           </a:p>
@@ -10026,7 +10026,7 @@
           <a:p>
             <a:fld id="{D744F8A8-A267-B942-B7E8-332CEB7B1ECE}" type="datetimeFigureOut">
               <a:rPr lang="es-CO" smtClean="0"/>
-              <a:t>27/04/26</a:t>
+              <a:t>27/05/26</a:t>
             </a:fld>
             <a:endParaRPr lang="es-CO"/>
           </a:p>
@@ -10168,7 +10168,7 @@
           <a:p>
             <a:fld id="{D744F8A8-A267-B942-B7E8-332CEB7B1ECE}" type="datetimeFigureOut">
               <a:rPr lang="es-CO" smtClean="0"/>
-              <a:t>27/04/26</a:t>
+              <a:t>27/05/26</a:t>
             </a:fld>
             <a:endParaRPr lang="es-CO"/>
           </a:p>
@@ -10281,7 +10281,7 @@
           <a:p>
             <a:fld id="{D744F8A8-A267-B942-B7E8-332CEB7B1ECE}" type="datetimeFigureOut">
               <a:rPr lang="es-CO" smtClean="0"/>
-              <a:t>27/04/26</a:t>
+              <a:t>27/05/26</a:t>
             </a:fld>
             <a:endParaRPr lang="es-CO"/>
           </a:p>
@@ -10594,7 +10594,7 @@
           <a:p>
             <a:fld id="{D744F8A8-A267-B942-B7E8-332CEB7B1ECE}" type="datetimeFigureOut">
               <a:rPr lang="es-CO" smtClean="0"/>
-              <a:t>27/04/26</a:t>
+              <a:t>27/05/26</a:t>
             </a:fld>
             <a:endParaRPr lang="es-CO"/>
           </a:p>
@@ -10883,7 +10883,7 @@
           <a:p>
             <a:fld id="{D744F8A8-A267-B942-B7E8-332CEB7B1ECE}" type="datetimeFigureOut">
               <a:rPr lang="es-CO" smtClean="0"/>
-              <a:t>27/04/26</a:t>
+              <a:t>27/05/26</a:t>
             </a:fld>
             <a:endParaRPr lang="es-CO"/>
           </a:p>
@@ -11126,7 +11126,7 @@
           <a:p>
             <a:fld id="{D744F8A8-A267-B942-B7E8-332CEB7B1ECE}" type="datetimeFigureOut">
               <a:rPr lang="es-CO" smtClean="0"/>
-              <a:t>27/04/26</a:t>
+              <a:t>27/05/26</a:t>
             </a:fld>
             <a:endParaRPr lang="es-CO"/>
           </a:p>
@@ -11967,15 +11967,7 @@
           <a:p>
             <a:r>
               <a:rPr lang="es-ES_tradnl" b="1" noProof="1"/>
-              <a:t>Fecha:</a:t>
-            </a:r>
-            <a:r>
-              <a:rPr lang="es-ES_tradnl" noProof="1"/>
-              <a:t> </a:t>
-            </a:r>
-            <a:r>
-              <a:rPr lang="es-ES_tradnl" i="1" noProof="1"/>
-              <a:t>27 de abril 2026</a:t>
+              <a:t>Fecha: 27 de mayo de 2026</a:t>
             </a:r>
           </a:p>
           <a:p>
@@ -11984,8 +11976,8 @@
               <a:t>Entregable Descripción: </a:t>
             </a:r>
             <a:r>
-              <a:rPr lang="es-ES_tradnl" sz="2400" i="1" noProof="1"/>
-              <a:t>Se presenta el avance del proyecto enfocado en la detección temprana de deserción. Incluye: Refinamiento de la pregunta problema y objetivos, desarrollo de la justificación con enfoque en equidad y remediación, descripción metodológica de 5 fases para el modelo predictivo y la Matriz de Vigilancia Tecnológica con 6 referentes.</a:t>
+              <a:rPr lang="es-ES_tradnl" sz="2000" noProof="1"/>
+              <a:t>Se presenta el avance del proyecto en TRL-3 (demostración experimental). Incluye: generación del conjunto de datos sintéticos (n = 1 000 registros, tasa de deserción 17,6 %), entrenamiento y comparación de Random Forest y XGBoost, y análisis de importancia de variables. Random Forest alcanzó exactitud del 95,0 % y AUC = 0,976; XGBoost alcanzó sensibilidad del 85,7 % y F1 = 87,0 %. Próximo paso: validación con datos reales anonimizados de la ETITC (TRL-4).</a:t>
             </a:r>
           </a:p>
           <a:p>
@@ -13057,26 +13049,6 @@
 </file>
 
 <file path=customXml/item1.xml><?xml version="1.0" encoding="utf-8"?>
-<p:properties xmlns:p="http://schemas.microsoft.com/office/2006/metadata/properties" xmlns:xsi="http://www.w3.org/2001/XMLSchema-instance" xmlns:pc="http://schemas.microsoft.com/office/infopath/2007/PartnerControls">
-  <documentManagement>
-    <lcf76f155ced4ddcb4097134ff3c332f xmlns="79c476a6-c5b9-4cfe-a7aa-2ad5e94369df">
-      <Terms xmlns="http://schemas.microsoft.com/office/infopath/2007/PartnerControls"/>
-    </lcf76f155ced4ddcb4097134ff3c332f>
-    <TaxCatchAll xmlns="42a3b858-a068-4efd-92d5-337c04f112a9" xsi:nil="true"/>
-  </documentManagement>
-</p:properties>
-</file>
-
-<file path=customXml/item2.xml><?xml version="1.0" encoding="utf-8"?>
-<?mso-contentType ?>
-<FormTemplates xmlns="http://schemas.microsoft.com/sharepoint/v3/contenttype/forms">
-  <Display>DocumentLibraryForm</Display>
-  <Edit>DocumentLibraryForm</Edit>
-  <New>DocumentLibraryForm</New>
-</FormTemplates>
-</file>
-
-<file path=customXml/item3.xml><?xml version="1.0" encoding="utf-8"?>
 <ct:contentTypeSchema xmlns:ct="http://schemas.microsoft.com/office/2006/metadata/contentType" xmlns:ma="http://schemas.microsoft.com/office/2006/metadata/properties/metaAttributes" ct:_="" ma:_="" ma:contentTypeName="Document" ma:contentTypeID="0x0101000193CE827C8C9F4D8EAD4B239E1CEE09" ma:contentTypeVersion="11" ma:contentTypeDescription="Create a new document." ma:contentTypeScope="" ma:versionID="5486cecc5217b2bc395194abbd20fb2f">
   <xsd:schema xmlns:xsd="http://www.w3.org/2001/XMLSchema" xmlns:xs="http://www.w3.org/2001/XMLSchema" xmlns:p="http://schemas.microsoft.com/office/2006/metadata/properties" xmlns:ns2="79c476a6-c5b9-4cfe-a7aa-2ad5e94369df" xmlns:ns3="42a3b858-a068-4efd-92d5-337c04f112a9" targetNamespace="http://schemas.microsoft.com/office/2006/metadata/properties" ma:root="true" ma:fieldsID="cce21f25107eb973eb59d7f7f405b024" ns2:_="" ns3:_="">
     <xsd:import namespace="79c476a6-c5b9-4cfe-a7aa-2ad5e94369df"/>
@@ -13271,26 +13243,27 @@
 </ct:contentTypeSchema>
 </file>
 
-<file path=customXml/itemProps1.xml><?xml version="1.0" encoding="utf-8"?>
-<ds:datastoreItem xmlns:ds="http://schemas.openxmlformats.org/officeDocument/2006/customXml" ds:itemID="{A4822237-EE0A-4103-8712-3B7AB6E390E2}">
-  <ds:schemaRefs>
-    <ds:schemaRef ds:uri="42a3b858-a068-4efd-92d5-337c04f112a9"/>
-    <ds:schemaRef ds:uri="79c476a6-c5b9-4cfe-a7aa-2ad5e94369df"/>
-    <ds:schemaRef ds:uri="http://schemas.microsoft.com/office/2006/metadata/properties"/>
-    <ds:schemaRef ds:uri="http://schemas.microsoft.com/office/infopath/2007/PartnerControls"/>
-  </ds:schemaRefs>
-</ds:datastoreItem>
+<file path=customXml/item2.xml><?xml version="1.0" encoding="utf-8"?>
+<?mso-contentType ?>
+<FormTemplates xmlns="http://schemas.microsoft.com/sharepoint/v3/contenttype/forms">
+  <Display>DocumentLibraryForm</Display>
+  <Edit>DocumentLibraryForm</Edit>
+  <New>DocumentLibraryForm</New>
+</FormTemplates>
 </file>
 
-<file path=customXml/itemProps2.xml><?xml version="1.0" encoding="utf-8"?>
-<ds:datastoreItem xmlns:ds="http://schemas.openxmlformats.org/officeDocument/2006/customXml" ds:itemID="{BAE74CF2-5442-44BC-9E24-582282DD1644}">
-  <ds:schemaRefs>
-    <ds:schemaRef ds:uri="http://schemas.microsoft.com/sharepoint/v3/contenttype/forms"/>
-  </ds:schemaRefs>
-</ds:datastoreItem>
+<file path=customXml/item3.xml><?xml version="1.0" encoding="utf-8"?>
+<p:properties xmlns:p="http://schemas.microsoft.com/office/2006/metadata/properties" xmlns:xsi="http://www.w3.org/2001/XMLSchema-instance" xmlns:pc="http://schemas.microsoft.com/office/infopath/2007/PartnerControls">
+  <documentManagement>
+    <lcf76f155ced4ddcb4097134ff3c332f xmlns="79c476a6-c5b9-4cfe-a7aa-2ad5e94369df">
+      <Terms xmlns="http://schemas.microsoft.com/office/infopath/2007/PartnerControls"/>
+    </lcf76f155ced4ddcb4097134ff3c332f>
+    <TaxCatchAll xmlns="42a3b858-a068-4efd-92d5-337c04f112a9" xsi:nil="true"/>
+  </documentManagement>
+</p:properties>
 </file>
 
-<file path=customXml/itemProps3.xml><?xml version="1.0" encoding="utf-8"?>
+<file path=customXml/itemProps1.xml><?xml version="1.0" encoding="utf-8"?>
 <ds:datastoreItem xmlns:ds="http://schemas.openxmlformats.org/officeDocument/2006/customXml" ds:itemID="{F47943B9-E884-482C-B936-272751097726}">
   <ds:schemaRefs>
     <ds:schemaRef ds:uri="http://schemas.microsoft.com/office/2006/metadata/contentType"/>
@@ -13307,4 +13280,23 @@
     <ds:schemaRef ds:uri="http://schemas.microsoft.com/internal/obd"/>
   </ds:schemaRefs>
 </ds:datastoreItem>
+</file>
+
+<file path=customXml/itemProps2.xml><?xml version="1.0" encoding="utf-8"?>
+<ds:datastoreItem xmlns:ds="http://schemas.openxmlformats.org/officeDocument/2006/customXml" ds:itemID="{BAE74CF2-5442-44BC-9E24-582282DD1644}">
+  <ds:schemaRefs>
+    <ds:schemaRef ds:uri="http://schemas.microsoft.com/sharepoint/v3/contenttype/forms"/>
+  </ds:schemaRefs>
+</ds:datastoreItem>
+</file>
+
+<file path=customXml/itemProps3.xml><?xml version="1.0" encoding="utf-8"?>
+<ds:datastoreItem xmlns:ds="http://schemas.openxmlformats.org/officeDocument/2006/customXml" ds:itemID="{A4822237-EE0A-4103-8712-3B7AB6E390E2}">
+  <ds:schemaRefs>
+    <ds:schemaRef ds:uri="42a3b858-a068-4efd-92d5-337c04f112a9"/>
+    <ds:schemaRef ds:uri="79c476a6-c5b9-4cfe-a7aa-2ad5e94369df"/>
+    <ds:schemaRef ds:uri="http://schemas.microsoft.com/office/2006/metadata/properties"/>
+    <ds:schemaRef ds:uri="http://schemas.microsoft.com/office/infopath/2007/PartnerControls"/>
+  </ds:schemaRefs>
+</ds:datastoreItem>
 </file>